--- a/media/resources/files/Onduktar_Sandardy_iReettoo_1234_2XgIYv4.pptx
+++ b/media/resources/files/Onduktar_Sandardy_iReettoo_1234_2XgIYv4.pptx
@@ -8079,7 +8079,7 @@
                 <a:ea typeface="+mn-ea"/>
                 <a:cs typeface="+mn-cs"/>
               </a:rPr>
-              <a:t>Турдуу пикирлер учун ыраазычылык билдиребиз.</a:t>
+              <a:t>Түрдүү пикирлер үчүн ыраазычылык билдиребиз.</a:t>
             </a:r>
           </a:p>
           <a:p>

--- a/media/resources/files/Onduktar_Sandardy_iReettoo_1234_2XgIYv4.pptx
+++ b/media/resources/files/Onduktar_Sandardy_iReettoo_1234_2XgIYv4.pptx
@@ -1918,7 +1918,7 @@
           <a:p>
             <a:r>
               <a:rPr lang="en-GB" dirty="0"/>
-              <a:t>0.45</a:t>
+              <a:t>0,45</a:t>
             </a:r>
           </a:p>
         </p:txBody>
@@ -1953,7 +1953,7 @@
           <a:p>
             <a:r>
               <a:rPr lang="en-GB" dirty="0"/>
-              <a:t>0.5</a:t>
+              <a:t>0,5</a:t>
             </a:r>
           </a:p>
         </p:txBody>
@@ -1988,7 +1988,7 @@
           <a:p>
             <a:r>
               <a:rPr lang="en-GB" dirty="0"/>
-              <a:t>0.4</a:t>
+              <a:t>0,4</a:t>
             </a:r>
           </a:p>
         </p:txBody>
@@ -2291,7 +2291,7 @@
           <a:p>
             <a:r>
               <a:rPr lang="en-GB" dirty="0"/>
-              <a:t>0.98</a:t>
+              <a:t>0,98</a:t>
             </a:r>
           </a:p>
         </p:txBody>
@@ -2326,7 +2326,7 @@
           <a:p>
             <a:r>
               <a:rPr lang="en-GB" dirty="0"/>
-              <a:t>0.9</a:t>
+              <a:t>0,9</a:t>
             </a:r>
           </a:p>
         </p:txBody>
@@ -2361,7 +2361,7 @@
           <a:p>
             <a:r>
               <a:rPr lang="en-GB" dirty="0"/>
-              <a:t>0.809</a:t>
+              <a:t>0,809</a:t>
             </a:r>
           </a:p>
         </p:txBody>
@@ -2711,7 +2711,7 @@
           <a:p>
             <a:r>
               <a:rPr lang="en-GB" dirty="0"/>
-              <a:t>0.89</a:t>
+              <a:t>0,89</a:t>
             </a:r>
           </a:p>
         </p:txBody>
@@ -2783,7 +2783,7 @@
             <a:pPr algn="ctr"/>
             <a:r>
               <a:rPr lang="en-GB" dirty="0"/>
-              <a:t>0.23</a:t>
+              <a:t>0,23</a:t>
             </a:r>
           </a:p>
         </p:txBody>
@@ -2819,7 +2819,7 @@
             <a:pPr algn="ctr"/>
             <a:r>
               <a:rPr lang="en-GB" dirty="0"/>
-              <a:t>0.203</a:t>
+              <a:t>0,203</a:t>
             </a:r>
           </a:p>
         </p:txBody>
@@ -2855,7 +2855,7 @@
             <a:pPr algn="ctr"/>
             <a:r>
               <a:rPr lang="en-GB" dirty="0"/>
-              <a:t>0.032</a:t>
+              <a:t>0,032</a:t>
             </a:r>
           </a:p>
         </p:txBody>
@@ -2891,7 +2891,7 @@
             <a:pPr algn="ctr"/>
             <a:r>
               <a:rPr lang="en-GB" dirty="0"/>
-              <a:t>0.302</a:t>
+              <a:t>0,302</a:t>
             </a:r>
           </a:p>
         </p:txBody>
@@ -2927,7 +2927,7 @@
             <a:pPr algn="ctr"/>
             <a:r>
               <a:rPr lang="en-GB" dirty="0"/>
-              <a:t>0.32</a:t>
+              <a:t>0,32</a:t>
             </a:r>
           </a:p>
         </p:txBody>
@@ -2999,7 +2999,7 @@
             <a:pPr algn="ctr"/>
             <a:r>
               <a:rPr lang="en-GB" dirty="0"/>
-              <a:t>0.7</a:t>
+              <a:t>0,7</a:t>
             </a:r>
           </a:p>
         </p:txBody>
@@ -3096,7 +3096,7 @@
             <a:pPr algn="ctr"/>
             <a:r>
               <a:rPr lang="en-GB" dirty="0"/>
-              <a:t>0.78</a:t>
+              <a:t>0,78</a:t>
             </a:r>
           </a:p>
         </p:txBody>
@@ -3132,7 +3132,7 @@
             <a:pPr algn="ctr"/>
             <a:r>
               <a:rPr lang="en-GB" dirty="0"/>
-              <a:t>0.78</a:t>
+              <a:t>0,78</a:t>
             </a:r>
           </a:p>
         </p:txBody>
@@ -3229,7 +3229,7 @@
             <a:pPr algn="ctr"/>
             <a:r>
               <a:rPr lang="en-GB" dirty="0"/>
-              <a:t>0.876</a:t>
+              <a:t>0,876</a:t>
             </a:r>
           </a:p>
         </p:txBody>
@@ -3265,7 +3265,7 @@
             <a:pPr algn="ctr"/>
             <a:r>
               <a:rPr lang="en-GB" dirty="0"/>
-              <a:t>0.87</a:t>
+              <a:t>0,87</a:t>
             </a:r>
           </a:p>
         </p:txBody>
@@ -3495,7 +3495,7 @@
             <a:pPr algn="just"/>
             <a:r>
               <a:rPr lang="en-GB" sz="2000" dirty="0"/>
-              <a:t>0.4</a:t>
+              <a:t>0,4</a:t>
             </a:r>
           </a:p>
         </p:txBody>
@@ -3766,7 +3766,7 @@
             <a:pPr algn="just"/>
             <a:r>
               <a:rPr lang="en-GB" sz="2000" dirty="0"/>
-              <a:t>0.45</a:t>
+              <a:t>0,45</a:t>
             </a:r>
           </a:p>
         </p:txBody>
@@ -3811,7 +3811,7 @@
             <a:pPr algn="just"/>
             <a:r>
               <a:rPr lang="en-GB" sz="2000" dirty="0"/>
-              <a:t>0.5</a:t>
+              <a:t>0,5</a:t>
             </a:r>
           </a:p>
         </p:txBody>
@@ -3856,7 +3856,7 @@
             <a:pPr algn="just"/>
             <a:r>
               <a:rPr lang="en-GB" sz="2000" dirty="0"/>
-              <a:t>0.98</a:t>
+              <a:t>0,98</a:t>
             </a:r>
           </a:p>
         </p:txBody>
@@ -4031,7 +4031,7 @@
             <a:pPr algn="just"/>
             <a:r>
               <a:rPr lang="en-GB" sz="2000" dirty="0"/>
-              <a:t>0.89</a:t>
+              <a:t>0,89</a:t>
             </a:r>
           </a:p>
         </p:txBody>
@@ -4076,7 +4076,7 @@
             <a:pPr algn="just"/>
             <a:r>
               <a:rPr lang="en-GB" sz="2000" dirty="0"/>
-              <a:t>0.809</a:t>
+              <a:t>0,809</a:t>
             </a:r>
           </a:p>
         </p:txBody>
@@ -4306,7 +4306,7 @@
             <a:pPr algn="just"/>
             <a:r>
               <a:rPr lang="en-GB" sz="2000" dirty="0"/>
-              <a:t>0.9</a:t>
+              <a:t>0,9</a:t>
             </a:r>
           </a:p>
         </p:txBody>
@@ -4351,7 +4351,7 @@
             <a:pPr algn="ctr"/>
             <a:r>
               <a:rPr lang="en-GB" sz="2000" dirty="0"/>
-              <a:t>0.302</a:t>
+              <a:t>0,302</a:t>
             </a:r>
           </a:p>
         </p:txBody>
@@ -4396,7 +4396,7 @@
             <a:pPr algn="ctr"/>
             <a:r>
               <a:rPr lang="en-GB" sz="2000" dirty="0"/>
-              <a:t>0.23</a:t>
+              <a:t>0,23</a:t>
             </a:r>
           </a:p>
         </p:txBody>
@@ -4441,7 +4441,7 @@
             <a:pPr algn="ctr"/>
             <a:r>
               <a:rPr lang="en-GB" sz="2000" dirty="0"/>
-              <a:t>0.32</a:t>
+              <a:t>0,32</a:t>
             </a:r>
           </a:p>
         </p:txBody>
@@ -4486,7 +4486,7 @@
             <a:pPr algn="ctr"/>
             <a:r>
               <a:rPr lang="en-GB" sz="2000" dirty="0"/>
-              <a:t>0.203</a:t>
+              <a:t>0,203</a:t>
             </a:r>
           </a:p>
         </p:txBody>
@@ -4531,7 +4531,7 @@
             <a:pPr algn="ctr"/>
             <a:r>
               <a:rPr lang="en-GB" sz="2000" dirty="0"/>
-              <a:t>0.032</a:t>
+              <a:t>0,032</a:t>
             </a:r>
           </a:p>
         </p:txBody>
@@ -4576,7 +4576,7 @@
             <a:pPr algn="ctr"/>
             <a:r>
               <a:rPr lang="en-GB" sz="2000" dirty="0"/>
-              <a:t>0.876</a:t>
+              <a:t>0,876</a:t>
             </a:r>
           </a:p>
         </p:txBody>
@@ -4621,7 +4621,7 @@
             <a:pPr algn="ctr"/>
             <a:r>
               <a:rPr lang="en-GB" sz="2000" dirty="0"/>
-              <a:t>0.87</a:t>
+              <a:t>0,87</a:t>
             </a:r>
           </a:p>
         </p:txBody>
@@ -4666,7 +4666,7 @@
             <a:pPr algn="ctr"/>
             <a:r>
               <a:rPr lang="en-GB" sz="2000" dirty="0"/>
-              <a:t>0.7</a:t>
+              <a:t>0,7</a:t>
             </a:r>
           </a:p>
         </p:txBody>
@@ -4711,7 +4711,7 @@
             <a:pPr algn="ctr"/>
             <a:r>
               <a:rPr lang="en-GB" sz="2000" dirty="0"/>
-              <a:t>0.78</a:t>
+              <a:t>0,78</a:t>
             </a:r>
           </a:p>
         </p:txBody>
@@ -4756,7 +4756,7 @@
             <a:pPr algn="ctr"/>
             <a:r>
               <a:rPr lang="en-GB" sz="2000" dirty="0"/>
-              <a:t>0.78</a:t>
+              <a:t>0,78</a:t>
             </a:r>
           </a:p>
         </p:txBody>
@@ -5453,7 +5453,7 @@
           <a:p>
             <a:r>
               <a:rPr lang="en-GB" dirty="0"/>
-              <a:t>0.45</a:t>
+              <a:t>0,45</a:t>
             </a:r>
           </a:p>
         </p:txBody>
@@ -5488,7 +5488,7 @@
           <a:p>
             <a:r>
               <a:rPr lang="en-GB" dirty="0"/>
-              <a:t>0.5</a:t>
+              <a:t>0,5</a:t>
             </a:r>
           </a:p>
         </p:txBody>
@@ -5523,7 +5523,7 @@
           <a:p>
             <a:r>
               <a:rPr lang="en-GB" dirty="0"/>
-              <a:t>0.4</a:t>
+              <a:t>0,4</a:t>
             </a:r>
           </a:p>
         </p:txBody>
@@ -5826,7 +5826,7 @@
           <a:p>
             <a:r>
               <a:rPr lang="en-GB" dirty="0"/>
-              <a:t>0.98</a:t>
+              <a:t>0,98</a:t>
             </a:r>
           </a:p>
         </p:txBody>
@@ -5861,7 +5861,7 @@
           <a:p>
             <a:r>
               <a:rPr lang="en-GB" dirty="0"/>
-              <a:t>0.9</a:t>
+              <a:t>0,9</a:t>
             </a:r>
           </a:p>
         </p:txBody>
@@ -5896,7 +5896,7 @@
           <a:p>
             <a:r>
               <a:rPr lang="en-GB" dirty="0"/>
-              <a:t>0.809</a:t>
+              <a:t>0,809</a:t>
             </a:r>
           </a:p>
         </p:txBody>
@@ -6246,7 +6246,7 @@
           <a:p>
             <a:r>
               <a:rPr lang="en-GB" dirty="0"/>
-              <a:t>0.89</a:t>
+              <a:t>0,89</a:t>
             </a:r>
           </a:p>
         </p:txBody>
@@ -6318,7 +6318,7 @@
             <a:pPr algn="ctr"/>
             <a:r>
               <a:rPr lang="en-GB" dirty="0"/>
-              <a:t>0.23</a:t>
+              <a:t>0,23</a:t>
             </a:r>
           </a:p>
         </p:txBody>
@@ -6354,7 +6354,7 @@
             <a:pPr algn="ctr"/>
             <a:r>
               <a:rPr lang="en-GB" dirty="0"/>
-              <a:t>0.203</a:t>
+              <a:t>0,203</a:t>
             </a:r>
           </a:p>
         </p:txBody>
@@ -6390,7 +6390,7 @@
             <a:pPr algn="ctr"/>
             <a:r>
               <a:rPr lang="en-GB" dirty="0"/>
-              <a:t>0.032</a:t>
+              <a:t>0,032</a:t>
             </a:r>
           </a:p>
         </p:txBody>
@@ -6426,7 +6426,7 @@
             <a:pPr algn="ctr"/>
             <a:r>
               <a:rPr lang="en-GB" dirty="0"/>
-              <a:t>0.302</a:t>
+              <a:t>0,302</a:t>
             </a:r>
           </a:p>
         </p:txBody>
@@ -6462,7 +6462,7 @@
             <a:pPr algn="ctr"/>
             <a:r>
               <a:rPr lang="en-GB" dirty="0"/>
-              <a:t>0.32</a:t>
+              <a:t>0,32</a:t>
             </a:r>
           </a:p>
         </p:txBody>
@@ -6534,7 +6534,7 @@
             <a:pPr algn="ctr"/>
             <a:r>
               <a:rPr lang="en-GB" dirty="0"/>
-              <a:t>0.7</a:t>
+              <a:t>0,7</a:t>
             </a:r>
           </a:p>
         </p:txBody>
@@ -6631,7 +6631,7 @@
             <a:pPr algn="ctr"/>
             <a:r>
               <a:rPr lang="en-GB" dirty="0"/>
-              <a:t>0.78</a:t>
+              <a:t>0,78</a:t>
             </a:r>
           </a:p>
         </p:txBody>
@@ -6667,7 +6667,7 @@
             <a:pPr algn="ctr"/>
             <a:r>
               <a:rPr lang="en-GB" dirty="0"/>
-              <a:t>0.78</a:t>
+              <a:t>0,78</a:t>
             </a:r>
           </a:p>
         </p:txBody>
@@ -6764,7 +6764,7 @@
             <a:pPr algn="ctr"/>
             <a:r>
               <a:rPr lang="en-GB" dirty="0"/>
-              <a:t>0.876</a:t>
+              <a:t>0,876</a:t>
             </a:r>
           </a:p>
         </p:txBody>
@@ -6800,7 +6800,7 @@
             <a:pPr algn="ctr"/>
             <a:r>
               <a:rPr lang="en-GB" dirty="0"/>
-              <a:t>0.87</a:t>
+              <a:t>0,87</a:t>
             </a:r>
           </a:p>
         </p:txBody>
